--- a/slides/aula-03-requisitos-historias-usuario.pptx
+++ b/slides/aula-03-requisitos-historias-usuario.pptx
@@ -4157,7 +4157,7 @@
                 <a:ea typeface="Calibri" pitchFamily="34" charset="-122"/>
                 <a:cs typeface="Calibri" pitchFamily="34" charset="-120"/>
               </a:rPr>
-              <a:t>Em duplas ou trios — escolham 1 das 3 opções</a:t>
+              <a:t>Em grupo (3 a 5 pessoas) — escolham 1 das 3 opções</a:t>
             </a:r>
             <a:endParaRPr lang="en-US" sz="1300" dirty="0"/>
           </a:p>

--- a/slides/aula-03-requisitos-historias-usuario.pptx
+++ b/slides/aula-03-requisitos-historias-usuario.pptx
@@ -957,7 +957,7 @@
           <a:p>
             <a:r>
               <a:rPr lang="en-US" dirty="0"/>
-              <a:t>Correção binária: entregou no prazo e no formato, pontuou.</a:t>
+              <a:t>As três atividades são complementares: a 1 produz, a 2 transforma, a 3 usa e critica IA. Correção binária: entregou as três no prazo e no formato, pontuou.</a:t>
             </a:r>
             <a:endParaRPr lang="en-US" dirty="0"/>
           </a:p>
@@ -4015,6 +4015,27 @@
                 <a:ea typeface="Calibri" pitchFamily="34" charset="-122"/>
                 <a:cs typeface="Calibri" pitchFamily="34" charset="-120"/>
               </a:rPr>
+              <a:t>Rodar npm run db:migrar: o banco da Unidade 1 é SQLite, embutido no Node.</a:t>
+            </a:r>
+            <a:endParaRPr lang="en-US" sz="1500" dirty="0"/>
+          </a:p>
+          <a:p>
+            <a:pPr marL="342900" indent="-342900">
+              <a:spcAft>
+                <a:spcPts val="1000"/>
+              </a:spcAft>
+              <a:buSzPct val="100000"/>
+              <a:buChar char="•"/>
+            </a:pPr>
+            <a:r>
+              <a:rPr lang="en-US" sz="1500" dirty="0">
+                <a:solidFill>
+                  <a:srgbClr val="36454F"/>
+                </a:solidFill>
+                <a:latin typeface="Calibri" pitchFamily="34" charset="0"/>
+                <a:ea typeface="Calibri" pitchFamily="34" charset="-122"/>
+                <a:cs typeface="Calibri" pitchFamily="34" charset="-120"/>
+              </a:rPr>
               <a:t>Se usar IA, registrar o que ela gerou e o que vocês mudaram.</a:t>
             </a:r>
             <a:endParaRPr lang="en-US" sz="1500" dirty="0"/>
@@ -4157,7 +4178,7 @@
                 <a:ea typeface="Calibri" pitchFamily="34" charset="-122"/>
                 <a:cs typeface="Calibri" pitchFamily="34" charset="-120"/>
               </a:rPr>
-              <a:t>Em grupo (3 a 5 pessoas) — escolham 1 das 3 opções</a:t>
+              <a:t>Em grupo (3 a 5 pessoas) — as três atividades, na ordem</a:t>
             </a:r>
             <a:endParaRPr lang="en-US" sz="1300" dirty="0"/>
           </a:p>
@@ -4407,7 +4428,7 @@
                 <a:ea typeface="Calibri" pitchFamily="34" charset="-122"/>
                 <a:cs typeface="Calibri" pitchFamily="34" charset="-120"/>
               </a:rPr>
-              <a:t>Pegar uma história gigante e quebrá-la em 3 menores, cada uma com valor independente.</a:t>
+              <a:t>Pegar uma história "gigante" e quebrá-la em 3 menores, cada uma com valor independente.</a:t>
             </a:r>
             <a:endParaRPr lang="en-US" sz="1350" dirty="0"/>
           </a:p>
@@ -4532,7 +4553,7 @@
                 <a:ea typeface="Calibri" pitchFamily="34" charset="-122"/>
                 <a:cs typeface="Calibri" pitchFamily="34" charset="-120"/>
               </a:rPr>
-              <a:t>Gerar histórias com IA e corrigir ou melhorar pelo menos 3, registrando o que mudou e por quê.</a:t>
+              <a:t>Gerar histórias com IA e corrigir/melhorar pelo menos 3, registrando o que mudou e por quê.</a:t>
             </a:r>
             <a:endParaRPr lang="en-US" sz="1350" dirty="0"/>
           </a:p>
@@ -4571,7 +4592,7 @@
                 <a:ea typeface="Calibri" pitchFamily="34" charset="-122"/>
                 <a:cs typeface="Calibri" pitchFamily="34" charset="-120"/>
               </a:rPr>
-              <a:t>Entrega ao final do encontro · vale 0,25</a:t>
+              <a:t>As três, entregues ao final do encontro · valem 0,25</a:t>
             </a:r>
             <a:endParaRPr lang="en-US" sz="1000" dirty="0"/>
           </a:p>
@@ -5856,9 +5877,9 @@
             <a:tbl>
               <a:tblPr/>
               <a:tblGrid>
-                <a:gridCol w="2286000"/>
-                <a:gridCol w="1005840"/>
-                <a:gridCol w="4937760"/>
+                <a:gridCol w="2194560"/>
+                <a:gridCol w="3017520"/>
+                <a:gridCol w="3017520"/>
               </a:tblGrid>
               <a:tr h="310896">
                 <a:tc>

--- a/slides/aula-03-requisitos-historias-usuario.pptx
+++ b/slides/aula-03-requisitos-historias-usuario.pptx
@@ -12542,7 +12542,7 @@
                 <a:ea typeface="Calibri" pitchFamily="34" charset="-122"/>
                 <a:cs typeface="Calibri" pitchFamily="34" charset="-120"/>
               </a:rPr>
-              <a:t>## Uso de IA preenchido: o que a IA gerou, o que mudou e por quê — incluindo a regra que ela inventou.</a:t>
+              <a:t>## Uso de IA preenchido: pelo menos 3 histórias identificadas por número (#), com o que a IA gerou, o que mudou e por quê — incluindo a regra que ela inventou.</a:t>
             </a:r>
             <a:endParaRPr lang="en-US" sz="1500" dirty="0"/>
           </a:p>

--- a/slides/aula-03-requisitos-historias-usuario.pptx
+++ b/slides/aula-03-requisitos-historias-usuario.pptx
@@ -13555,7 +13555,7 @@
                 <a:ea typeface="Calibri" pitchFamily="34" charset="-122"/>
                 <a:cs typeface="Calibri" pitchFamily="34" charset="-120"/>
               </a:rPr>
-              <a:t>O repositório sobe e o CI está verde — mas as regras de negócio são stubs que lançam erro.</a:t>
+              <a:t>CI verde, mas as regras de negócio ainda são stubs que lançam erro.</a:t>
             </a:r>
             <a:endParaRPr lang="en-US" sz="1600" dirty="0"/>
           </a:p>
@@ -13576,7 +13576,7 @@
                 <a:ea typeface="Calibri" pitchFamily="34" charset="-122"/>
                 <a:cs typeface="Calibri" pitchFamily="34" charset="-120"/>
               </a:rPr>
-              <a:t>tests/doacoes.test.js tem cinco it.todo esperando: são os critérios da história zero.</a:t>
+              <a:t>tests/doacoes.test.js tem cinco it.todo — os critérios da história zero. Um deles já é a regra que a Aula 2 classificou.</a:t>
             </a:r>
             <a:endParaRPr lang="en-US" sz="1600" dirty="0"/>
           </a:p>
